--- a/ポートフォリオ_秋池.pptx
+++ b/ポートフォリオ_秋池.pptx
@@ -212,7 +212,7 @@
           <a:p>
             <a:fld id="{7DBB8152-7813-4DD7-8C30-6943339385CA}" type="datetimeFigureOut">
               <a:rPr kumimoji="1" lang="ja-JP" altLang="en-US" smtClean="0"/>
-              <a:t>2026/3/23</a:t>
+              <a:t>2026/10/9</a:t>
             </a:fld>
             <a:endParaRPr kumimoji="1" lang="ja-JP" altLang="en-US"/>
           </a:p>
@@ -941,7 +941,7 @@
           <a:p>
             <a:fld id="{48522A55-22D5-47DA-B376-12D74840BD06}" type="datetime1">
               <a:rPr kumimoji="1" lang="ja-JP" altLang="en-US" smtClean="0"/>
-              <a:t>2026/3/23</a:t>
+              <a:t>2026/10/9</a:t>
             </a:fld>
             <a:endParaRPr kumimoji="1" lang="ja-JP" altLang="en-US"/>
           </a:p>
@@ -1136,7 +1136,7 @@
           <a:p>
             <a:fld id="{E1847F1A-3080-4AE7-9245-F405EDE1DDF3}" type="datetime1">
               <a:rPr lang="ja-JP" altLang="en-US" smtClean="0"/>
-              <a:t>2026/3/23</a:t>
+              <a:t>2026/10/9</a:t>
             </a:fld>
             <a:endParaRPr lang="ja-JP" altLang="en-US"/>
           </a:p>
@@ -1506,7 +1506,7 @@
           <a:p>
             <a:fld id="{F1FA71E0-FC87-437A-9C14-FB30BE460721}" type="datetime1">
               <a:rPr lang="ja-JP" altLang="en-US" smtClean="0"/>
-              <a:t>2026/3/23</a:t>
+              <a:t>2026/10/9</a:t>
             </a:fld>
             <a:endParaRPr lang="ja-JP" altLang="en-US"/>
           </a:p>
@@ -2527,7 +2527,7 @@
                   <a:latin typeface="游ゴシック"/>
                   <a:ea typeface="游ゴシック"/>
                 </a:rPr>
-                <a:t>03</a:t>
+                <a:t>10</a:t>
               </a:r>
               <a:r>
                 <a:rPr lang="ja-JP" altLang="en-US" sz="1800" b="0" dirty="0">
@@ -2541,7 +2541,7 @@
                   <a:latin typeface="游ゴシック"/>
                   <a:ea typeface="游ゴシック"/>
                 </a:rPr>
-                <a:t>23</a:t>
+                <a:t>09</a:t>
               </a:r>
               <a:r>
                 <a:rPr lang="ja-JP" altLang="en-US" sz="1800" b="0" dirty="0">
@@ -5544,7 +5544,7 @@
         </p:nvSpPr>
         <p:spPr>
           <a:xfrm>
-            <a:off x="314625" y="4107949"/>
+            <a:off x="324992" y="3705260"/>
             <a:ext cx="2303949" cy="461665"/>
           </a:xfrm>
           <a:prstGeom prst="rect">
@@ -5695,7 +5695,7 @@
         </p:nvSpPr>
         <p:spPr>
           <a:xfrm>
-            <a:off x="324992" y="4600570"/>
+            <a:off x="324992" y="4154855"/>
             <a:ext cx="827205" cy="338554"/>
           </a:xfrm>
           <a:prstGeom prst="rect">
@@ -5841,7 +5841,7 @@
         </p:nvSpPr>
         <p:spPr>
           <a:xfrm>
-            <a:off x="1364864" y="4627463"/>
+            <a:off x="1328578" y="4476202"/>
             <a:ext cx="3340683" cy="307777"/>
           </a:xfrm>
           <a:prstGeom prst="rect">
@@ -6487,8 +6487,8 @@
         </p:nvSpPr>
         <p:spPr>
           <a:xfrm>
-            <a:off x="5404991" y="4591602"/>
-            <a:ext cx="1418143" cy="338554"/>
+            <a:off x="5404991" y="4565960"/>
+            <a:ext cx="1033549" cy="338554"/>
           </a:xfrm>
           <a:prstGeom prst="rect">
             <a:avLst/>
@@ -6630,7 +6630,7 @@
         </p:nvSpPr>
         <p:spPr>
           <a:xfrm>
-            <a:off x="6463909" y="5012948"/>
+            <a:off x="6438540" y="4567635"/>
             <a:ext cx="5039601" cy="1600438"/>
           </a:xfrm>
           <a:prstGeom prst="rect">
@@ -6940,7 +6940,7 @@
         </p:nvSpPr>
         <p:spPr>
           <a:xfrm>
-            <a:off x="318116" y="3958223"/>
+            <a:off x="335360" y="3622588"/>
             <a:ext cx="11430917" cy="36057"/>
           </a:xfrm>
           <a:prstGeom prst="rect">
@@ -7401,7 +7401,7 @@
         </p:nvSpPr>
         <p:spPr>
           <a:xfrm>
-            <a:off x="1364865" y="4914335"/>
+            <a:off x="1328578" y="4777399"/>
             <a:ext cx="3960170" cy="307777"/>
           </a:xfrm>
           <a:prstGeom prst="rect">
@@ -7548,7 +7548,7 @@
         </p:nvSpPr>
         <p:spPr>
           <a:xfrm>
-            <a:off x="1373830" y="5210169"/>
+            <a:off x="1328579" y="4176278"/>
             <a:ext cx="3340683" cy="307777"/>
           </a:xfrm>
           <a:prstGeom prst="rect">
@@ -7680,6 +7680,152 @@
                 <a:cs typeface="+mn-lt"/>
               </a:rPr>
               <a:t> Level-1</a:t>
+            </a:r>
+            <a:endParaRPr lang="ja-JP" sz="1400" dirty="0">
+              <a:solidFill>
+                <a:srgbClr val="000000"/>
+              </a:solidFill>
+              <a:latin typeface="游ゴシック"/>
+              <a:ea typeface="游ゴシック"/>
+              <a:cs typeface="+mn-lt"/>
+            </a:endParaRPr>
+          </a:p>
+        </p:txBody>
+      </p:sp>
+      <p:sp>
+        <p:nvSpPr>
+          <p:cNvPr id="10" name="テキスト ボックス 13">
+            <a:extLst>
+              <a:ext uri="{FF2B5EF4-FFF2-40B4-BE49-F238E27FC236}">
+                <a16:creationId xmlns:a16="http://schemas.microsoft.com/office/drawing/2014/main" id="{AF4DD8B2-71F4-8DCB-EE9D-2094E3622756}"/>
+              </a:ext>
+            </a:extLst>
+          </p:cNvPr>
+          <p:cNvSpPr txBox="1"/>
+          <p:nvPr/>
+        </p:nvSpPr>
+        <p:spPr>
+          <a:xfrm>
+            <a:off x="1328578" y="5063050"/>
+            <a:ext cx="4076412" cy="307777"/>
+          </a:xfrm>
+          <a:prstGeom prst="rect">
+            <a:avLst/>
+          </a:prstGeom>
+          <a:noFill/>
+          <a:ln>
+            <a:noFill/>
+          </a:ln>
+        </p:spPr>
+        <p:txBody>
+          <a:bodyPr wrap="square" lIns="91440" tIns="45720" rIns="91440" bIns="45720" anchor="t">
+            <a:spAutoFit/>
+          </a:bodyPr>
+          <a:lstStyle>
+            <a:defPPr>
+              <a:defRPr lang="ja-JP"/>
+            </a:defPPr>
+            <a:lvl1pPr marL="0" algn="l" defTabSz="914400" rtl="0" eaLnBrk="1" latinLnBrk="0" hangingPunct="1">
+              <a:defRPr kumimoji="1" sz="1800" kern="1200">
+                <a:solidFill>
+                  <a:schemeClr val="tx1"/>
+                </a:solidFill>
+                <a:latin typeface="+mn-lt"/>
+                <a:ea typeface="+mn-ea"/>
+                <a:cs typeface="+mn-cs"/>
+              </a:defRPr>
+            </a:lvl1pPr>
+            <a:lvl2pPr marL="457200" algn="l" defTabSz="914400" rtl="0" eaLnBrk="1" latinLnBrk="0" hangingPunct="1">
+              <a:defRPr kumimoji="1" sz="1800" kern="1200">
+                <a:solidFill>
+                  <a:schemeClr val="tx1"/>
+                </a:solidFill>
+                <a:latin typeface="+mn-lt"/>
+                <a:ea typeface="+mn-ea"/>
+                <a:cs typeface="+mn-cs"/>
+              </a:defRPr>
+            </a:lvl2pPr>
+            <a:lvl3pPr marL="914400" algn="l" defTabSz="914400" rtl="0" eaLnBrk="1" latinLnBrk="0" hangingPunct="1">
+              <a:defRPr kumimoji="1" sz="1800" kern="1200">
+                <a:solidFill>
+                  <a:schemeClr val="tx1"/>
+                </a:solidFill>
+                <a:latin typeface="+mn-lt"/>
+                <a:ea typeface="+mn-ea"/>
+                <a:cs typeface="+mn-cs"/>
+              </a:defRPr>
+            </a:lvl3pPr>
+            <a:lvl4pPr marL="1371600" algn="l" defTabSz="914400" rtl="0" eaLnBrk="1" latinLnBrk="0" hangingPunct="1">
+              <a:defRPr kumimoji="1" sz="1800" kern="1200">
+                <a:solidFill>
+                  <a:schemeClr val="tx1"/>
+                </a:solidFill>
+                <a:latin typeface="+mn-lt"/>
+                <a:ea typeface="+mn-ea"/>
+                <a:cs typeface="+mn-cs"/>
+              </a:defRPr>
+            </a:lvl4pPr>
+            <a:lvl5pPr marL="1828800" algn="l" defTabSz="914400" rtl="0" eaLnBrk="1" latinLnBrk="0" hangingPunct="1">
+              <a:defRPr kumimoji="1" sz="1800" kern="1200">
+                <a:solidFill>
+                  <a:schemeClr val="tx1"/>
+                </a:solidFill>
+                <a:latin typeface="+mn-lt"/>
+                <a:ea typeface="+mn-ea"/>
+                <a:cs typeface="+mn-cs"/>
+              </a:defRPr>
+            </a:lvl5pPr>
+            <a:lvl6pPr marL="2286000" algn="l" defTabSz="914400" rtl="0" eaLnBrk="1" latinLnBrk="0" hangingPunct="1">
+              <a:defRPr kumimoji="1" sz="1800" kern="1200">
+                <a:solidFill>
+                  <a:schemeClr val="tx1"/>
+                </a:solidFill>
+                <a:latin typeface="+mn-lt"/>
+                <a:ea typeface="+mn-ea"/>
+                <a:cs typeface="+mn-cs"/>
+              </a:defRPr>
+            </a:lvl6pPr>
+            <a:lvl7pPr marL="2743200" algn="l" defTabSz="914400" rtl="0" eaLnBrk="1" latinLnBrk="0" hangingPunct="1">
+              <a:defRPr kumimoji="1" sz="1800" kern="1200">
+                <a:solidFill>
+                  <a:schemeClr val="tx1"/>
+                </a:solidFill>
+                <a:latin typeface="+mn-lt"/>
+                <a:ea typeface="+mn-ea"/>
+                <a:cs typeface="+mn-cs"/>
+              </a:defRPr>
+            </a:lvl7pPr>
+            <a:lvl8pPr marL="3200400" algn="l" defTabSz="914400" rtl="0" eaLnBrk="1" latinLnBrk="0" hangingPunct="1">
+              <a:defRPr kumimoji="1" sz="1800" kern="1200">
+                <a:solidFill>
+                  <a:schemeClr val="tx1"/>
+                </a:solidFill>
+                <a:latin typeface="+mn-lt"/>
+                <a:ea typeface="+mn-ea"/>
+                <a:cs typeface="+mn-cs"/>
+              </a:defRPr>
+            </a:lvl8pPr>
+            <a:lvl9pPr marL="3657600" algn="l" defTabSz="914400" rtl="0" eaLnBrk="1" latinLnBrk="0" hangingPunct="1">
+              <a:defRPr kumimoji="1" sz="1800" kern="1200">
+                <a:solidFill>
+                  <a:schemeClr val="tx1"/>
+                </a:solidFill>
+                <a:latin typeface="+mn-lt"/>
+                <a:ea typeface="+mn-ea"/>
+                <a:cs typeface="+mn-cs"/>
+              </a:defRPr>
+            </a:lvl9pPr>
+          </a:lstStyle>
+          <a:p>
+            <a:r>
+              <a:rPr lang="en-US" altLang="ja-JP" sz="1400" dirty="0">
+                <a:solidFill>
+                  <a:srgbClr val="000000"/>
+                </a:solidFill>
+                <a:ea typeface="游ゴシック"/>
+                <a:cs typeface="+mn-lt"/>
+              </a:rPr>
+              <a:t>AWS Certified Solutions Architect - Associate</a:t>
             </a:r>
             <a:endParaRPr lang="ja-JP" sz="1400" dirty="0">
               <a:solidFill>

--- a/ポートフォリオ_秋池.pptx
+++ b/ポートフォリオ_秋池.pptx
@@ -212,7 +212,7 @@
           <a:p>
             <a:fld id="{7DBB8152-7813-4DD7-8C30-6943339385CA}" type="datetimeFigureOut">
               <a:rPr kumimoji="1" lang="ja-JP" altLang="en-US" smtClean="0"/>
-              <a:t>2026/10/9</a:t>
+              <a:t>2026/10/10</a:t>
             </a:fld>
             <a:endParaRPr kumimoji="1" lang="ja-JP" altLang="en-US"/>
           </a:p>
@@ -941,7 +941,7 @@
           <a:p>
             <a:fld id="{48522A55-22D5-47DA-B376-12D74840BD06}" type="datetime1">
               <a:rPr kumimoji="1" lang="ja-JP" altLang="en-US" smtClean="0"/>
-              <a:t>2026/10/9</a:t>
+              <a:t>2026/10/10</a:t>
             </a:fld>
             <a:endParaRPr kumimoji="1" lang="ja-JP" altLang="en-US"/>
           </a:p>
@@ -1136,7 +1136,7 @@
           <a:p>
             <a:fld id="{E1847F1A-3080-4AE7-9245-F405EDE1DDF3}" type="datetime1">
               <a:rPr lang="ja-JP" altLang="en-US" smtClean="0"/>
-              <a:t>2026/10/9</a:t>
+              <a:t>2026/10/10</a:t>
             </a:fld>
             <a:endParaRPr lang="ja-JP" altLang="en-US"/>
           </a:p>
@@ -1506,7 +1506,7 @@
           <a:p>
             <a:fld id="{F1FA71E0-FC87-437A-9C14-FB30BE460721}" type="datetime1">
               <a:rPr lang="ja-JP" altLang="en-US" smtClean="0"/>
-              <a:t>2026/10/9</a:t>
+              <a:t>2026/10/10</a:t>
             </a:fld>
             <a:endParaRPr lang="ja-JP" altLang="en-US"/>
           </a:p>
@@ -7825,7 +7825,27 @@
                 <a:ea typeface="游ゴシック"/>
                 <a:cs typeface="+mn-lt"/>
               </a:rPr>
-              <a:t>AWS Certified Solutions Architect - Associate</a:t>
+              <a:t>AWS Certified </a:t>
+            </a:r>
+            <a:r>
+              <a:rPr lang="en-US" altLang="ja-JP" sz="1400" dirty="0" err="1">
+                <a:solidFill>
+                  <a:srgbClr val="000000"/>
+                </a:solidFill>
+                <a:ea typeface="游ゴシック"/>
+                <a:cs typeface="+mn-lt"/>
+              </a:rPr>
+              <a:t>CloudOps</a:t>
+            </a:r>
+            <a:r>
+              <a:rPr lang="en-US" altLang="ja-JP" sz="1400" dirty="0">
+                <a:solidFill>
+                  <a:srgbClr val="000000"/>
+                </a:solidFill>
+                <a:ea typeface="游ゴシック"/>
+                <a:cs typeface="+mn-lt"/>
+              </a:rPr>
+              <a:t> Engineer - Associate</a:t>
             </a:r>
             <a:endParaRPr lang="ja-JP" sz="1400" dirty="0">
               <a:solidFill>
@@ -10746,16 +10766,6 @@
 </file>
 
 <file path=customXml/item1.xml><?xml version="1.0" encoding="utf-8"?>
-<p:properties xmlns:p="http://schemas.microsoft.com/office/2006/metadata/properties" xmlns:xsi="http://www.w3.org/2001/XMLSchema-instance" xmlns:pc="http://schemas.microsoft.com/office/infopath/2007/PartnerControls">
-  <documentManagement>
-    <lcf76f155ced4ddcb4097134ff3c332f xmlns="5d5e86c2-1981-49c0-a4c5-18f5e325411d">
-      <Terms xmlns="http://schemas.microsoft.com/office/infopath/2007/PartnerControls"/>
-    </lcf76f155ced4ddcb4097134ff3c332f>
-  </documentManagement>
-</p:properties>
-</file>
-
-<file path=customXml/item2.xml><?xml version="1.0" encoding="utf-8"?>
 <ct:contentTypeSchema xmlns:ct="http://schemas.microsoft.com/office/2006/metadata/contentType" xmlns:ma="http://schemas.microsoft.com/office/2006/metadata/properties/metaAttributes" ct:_="" ma:_="" ma:contentTypeName="ドキュメント" ma:contentTypeID="0x01010050778A40BB97904D942255E2E155F7D0" ma:contentTypeVersion="14" ma:contentTypeDescription="新しいドキュメントを作成します。" ma:contentTypeScope="" ma:versionID="69a6922dbfd1ab1826ad37d50c30c63c">
   <xsd:schema xmlns:xsd="http://www.w3.org/2001/XMLSchema" xmlns:xs="http://www.w3.org/2001/XMLSchema" xmlns:p="http://schemas.microsoft.com/office/2006/metadata/properties" xmlns:ns2="5d5e86c2-1981-49c0-a4c5-18f5e325411d" xmlns:ns3="3f560f56-3566-4265-8616-bf2c1da3872b" targetNamespace="http://schemas.microsoft.com/office/2006/metadata/properties" ma:root="true" ma:fieldsID="3fe0b2f1430f4c41453b7d9b1b5c55c1" ns2:_="" ns3:_="">
     <xsd:import namespace="5d5e86c2-1981-49c0-a4c5-18f5e325411d"/>
@@ -10972,6 +10982,16 @@
 </ct:contentTypeSchema>
 </file>
 
+<file path=customXml/item2.xml><?xml version="1.0" encoding="utf-8"?>
+<p:properties xmlns:p="http://schemas.microsoft.com/office/2006/metadata/properties" xmlns:xsi="http://www.w3.org/2001/XMLSchema-instance" xmlns:pc="http://schemas.microsoft.com/office/infopath/2007/PartnerControls">
+  <documentManagement>
+    <lcf76f155ced4ddcb4097134ff3c332f xmlns="5d5e86c2-1981-49c0-a4c5-18f5e325411d">
+      <Terms xmlns="http://schemas.microsoft.com/office/infopath/2007/PartnerControls"/>
+    </lcf76f155ced4ddcb4097134ff3c332f>
+  </documentManagement>
+</p:properties>
+</file>
+
 <file path=customXml/item3.xml><?xml version="1.0" encoding="utf-8"?>
 <?mso-contentType ?>
 <FormTemplates xmlns="http://schemas.microsoft.com/sharepoint/v3/contenttype/forms">
@@ -10982,16 +11002,6 @@
 </file>
 
 <file path=customXml/itemProps1.xml><?xml version="1.0" encoding="utf-8"?>
-<ds:datastoreItem xmlns:ds="http://schemas.openxmlformats.org/officeDocument/2006/customXml" ds:itemID="{06C0FC12-A96B-4033-90DC-496C404C70D1}">
-  <ds:schemaRefs>
-    <ds:schemaRef ds:uri="http://schemas.microsoft.com/office/2006/metadata/properties"/>
-    <ds:schemaRef ds:uri="http://schemas.microsoft.com/office/infopath/2007/PartnerControls"/>
-    <ds:schemaRef ds:uri="5d5e86c2-1981-49c0-a4c5-18f5e325411d"/>
-  </ds:schemaRefs>
-</ds:datastoreItem>
-</file>
-
-<file path=customXml/itemProps2.xml><?xml version="1.0" encoding="utf-8"?>
 <ds:datastoreItem xmlns:ds="http://schemas.openxmlformats.org/officeDocument/2006/customXml" ds:itemID="{3185AFE0-2C0D-480C-9101-310C580611BE}">
   <ds:schemaRefs>
     <ds:schemaRef ds:uri="http://schemas.microsoft.com/office/2006/metadata/contentType"/>
@@ -11010,6 +11020,16 @@
 </ds:datastoreItem>
 </file>
 
+<file path=customXml/itemProps2.xml><?xml version="1.0" encoding="utf-8"?>
+<ds:datastoreItem xmlns:ds="http://schemas.openxmlformats.org/officeDocument/2006/customXml" ds:itemID="{06C0FC12-A96B-4033-90DC-496C404C70D1}">
+  <ds:schemaRefs>
+    <ds:schemaRef ds:uri="http://schemas.microsoft.com/office/2006/metadata/properties"/>
+    <ds:schemaRef ds:uri="http://schemas.microsoft.com/office/infopath/2007/PartnerControls"/>
+    <ds:schemaRef ds:uri="5d5e86c2-1981-49c0-a4c5-18f5e325411d"/>
+  </ds:schemaRefs>
+</ds:datastoreItem>
+</file>
+
 <file path=customXml/itemProps3.xml><?xml version="1.0" encoding="utf-8"?>
 <ds:datastoreItem xmlns:ds="http://schemas.openxmlformats.org/officeDocument/2006/customXml" ds:itemID="{EC315674-D7B8-47E2-BC37-5670892D3199}">
   <ds:schemaRefs>
